--- a/dist/초5/사회·역사/역사와생활/초5_사회·역사_역사와생활_03_고려_학생용.pptx
+++ b/dist/초5/사회·역사/역사와생활/초5_사회·역사_역사와생활_03_고려_학생용.pptx
@@ -119,13 +119,13 @@
   <p:extLst>
     <p:ext uri="{521415D9-36F7-43E2-AB2F-B90AF26B5E84}">
       <p14:sectionLst xmlns:p14="http://schemas.microsoft.com/office/powerpoint/2010/main">
-        <p14:section name="도입" id="{e570c98f-0b95-615b-a98e-c985b591578d}">
+        <p14:section name="도입" id="{2c1bba77-ccf0-87aa-0682-b571f9071152}">
           <p14:sldIdLst>
             <p14:sldId id="256"/>
             <p14:sldId id="257"/>
           </p14:sldIdLst>
         </p14:section>
-        <p14:section name="개념" id="{e909ac19-c7a9-324e-85c4-5bbb84c201e4}">
+        <p14:section name="개념" id="{25bc6c51-2241-5817-3d83-8d0dd8bd5747}">
           <p14:sldIdLst>
             <p14:sldId id="258"/>
             <p14:sldId id="259"/>
@@ -134,30 +134,30 @@
             <p14:sldId id="263"/>
           </p14:sldIdLst>
         </p14:section>
-        <p14:section name="연습" id="{8637e307-38b9-e88a-527a-eda10f765ade}">
+        <p14:section name="연습" id="{be71820f-bc28-a80b-ea10-216f22c50a6d}">
           <p14:sldIdLst>
             <p14:sldId id="261"/>
             <p14:sldId id="264"/>
             <p14:sldId id="265"/>
           </p14:sldIdLst>
         </p14:section>
-        <p14:section name="개념" id="{4c887f2f-dd7a-ef45-2339-ede8c6befb70}">
+        <p14:section name="개념" id="{cbe87d42-3fcb-015e-0ef4-1bb07fdb66f7}">
           <p14:sldIdLst/>
         </p14:section>
-        <p14:section name="연습" id="{f408753b-085c-8f67-b7e4-77180332e8dd}">
+        <p14:section name="연습" id="{d5dc97c0-6360-f851-3cdf-b5e5774c8145}">
           <p14:sldIdLst/>
         </p14:section>
-        <p14:section name="확인" id="{ba076825-9efc-e9d8-66d4-19b21bafefaf}">
+        <p14:section name="확인" id="{6aba1f5e-a1c6-2707-d10d-c3498c406544}">
           <p14:sldIdLst>
             <p14:sldId id="266"/>
           </p14:sldIdLst>
         </p14:section>
-        <p14:section name="정리" id="{e47ce567-c223-d010-810f-c93a9f663d88}">
+        <p14:section name="정리" id="{e294ef93-7faa-fd06-b562-8b406be04167}">
           <p14:sldIdLst>
             <p14:sldId id="267"/>
           </p14:sldIdLst>
         </p14:section>
-        <p14:section name="보충" id="{21171614-d604-461d-245a-cb6a6235118a}">
+        <p14:section name="보충" id="{509d93f5-093c-ca0b-4e95-bae7649c4b70}">
           <p14:sldIdLst>
             <p14:sldId id="268"/>
           </p14:sldIdLst>

--- a/dist/초5/사회·역사/역사와생활/초5_사회·역사_역사와생활_03_고려_학생용.pptx
+++ b/dist/초5/사회·역사/역사와생활/초5_사회·역사_역사와생활_03_고려_학생용.pptx
@@ -119,13 +119,13 @@
   <p:extLst>
     <p:ext uri="{521415D9-36F7-43E2-AB2F-B90AF26B5E84}">
       <p14:sectionLst xmlns:p14="http://schemas.microsoft.com/office/powerpoint/2010/main">
-        <p14:section name="도입" id="{2c1bba77-ccf0-87aa-0682-b571f9071152}">
+        <p14:section name="도입" id="{cb9e8533-75a4-fa03-93e2-0f7b35771a9b}">
           <p14:sldIdLst>
             <p14:sldId id="256"/>
             <p14:sldId id="257"/>
           </p14:sldIdLst>
         </p14:section>
-        <p14:section name="개념" id="{25bc6c51-2241-5817-3d83-8d0dd8bd5747}">
+        <p14:section name="개념" id="{977555bd-7202-35cb-3255-5edeafe152ba}">
           <p14:sldIdLst>
             <p14:sldId id="258"/>
             <p14:sldId id="259"/>
@@ -134,30 +134,30 @@
             <p14:sldId id="263"/>
           </p14:sldIdLst>
         </p14:section>
-        <p14:section name="연습" id="{be71820f-bc28-a80b-ea10-216f22c50a6d}">
+        <p14:section name="연습" id="{c44c4713-dbd0-f8b7-2973-5b5b7d8d8cce}">
           <p14:sldIdLst>
             <p14:sldId id="261"/>
             <p14:sldId id="264"/>
             <p14:sldId id="265"/>
           </p14:sldIdLst>
         </p14:section>
-        <p14:section name="개념" id="{cbe87d42-3fcb-015e-0ef4-1bb07fdb66f7}">
+        <p14:section name="개념" id="{f4450524-387e-e516-cab8-b187df4935ce}">
           <p14:sldIdLst/>
         </p14:section>
-        <p14:section name="연습" id="{d5dc97c0-6360-f851-3cdf-b5e5774c8145}">
+        <p14:section name="연습" id="{b8bbcc08-7e84-5f74-33b5-18cb0ce87483}">
           <p14:sldIdLst/>
         </p14:section>
-        <p14:section name="확인" id="{6aba1f5e-a1c6-2707-d10d-c3498c406544}">
+        <p14:section name="확인" id="{20c3c076-a673-5a2b-d519-da1a9e150678}">
           <p14:sldIdLst>
             <p14:sldId id="266"/>
           </p14:sldIdLst>
         </p14:section>
-        <p14:section name="정리" id="{e294ef93-7faa-fd06-b562-8b406be04167}">
+        <p14:section name="정리" id="{dab2bb60-5847-f5b9-1fe1-9586e1dbc5ea}">
           <p14:sldIdLst>
             <p14:sldId id="267"/>
           </p14:sldIdLst>
         </p14:section>
-        <p14:section name="보충" id="{509d93f5-093c-ca0b-4e95-bae7649c4b70}">
+        <p14:section name="보충" id="{3e0b25c0-88aa-ba70-9bae-8c51ba1b9a6d}">
           <p14:sldIdLst>
             <p14:sldId id="268"/>
           </p14:sldIdLst>
